--- a/Gruppe_06-Arbeitszeitrechner_2.0/docs/Arbeitszeit-Auswertungsprogramm_v2.0.pptx
+++ b/Gruppe_06-Arbeitszeitrechner_2.0/docs/Arbeitszeit-Auswertungsprogramm_v2.0.pptx
@@ -125,7 +125,7 @@
 <file path=ppt/revisionInfo.xml><?xml version="1.0" encoding="utf-8"?>
 <p1510:revInfo xmlns:a="http://schemas.openxmlformats.org/drawingml/2006/main" xmlns:r="http://schemas.openxmlformats.org/officeDocument/2006/relationships" xmlns:p1510="http://schemas.microsoft.com/office/powerpoint/2015/10/main">
   <p1510:revLst>
-    <p1510:client id="{9F6C8682-619D-47BC-9277-E2C86F729DBB}" v="27" dt="2026-05-24T14:02:28.995"/>
+    <p1510:client id="{9F6C8682-619D-47BC-9277-E2C86F729DBB}" v="28" dt="2026-05-24T14:08:21.460"/>
   </p1510:revLst>
 </p1510:revInfo>
 </file>
@@ -135,7 +135,7 @@
   <pc:docChgLst>
     <pc:chgData name="Mehmedali Abdiu (s)" userId="6ba2def0-b9b1-4049-863c-8bfc2eb26721" providerId="ADAL" clId="{45502CF0-928D-44D5-8886-D139521CFA9E}"/>
     <pc:docChg chg="undo custSel modSld sldOrd">
-      <pc:chgData name="Mehmedali Abdiu (s)" userId="6ba2def0-b9b1-4049-863c-8bfc2eb26721" providerId="ADAL" clId="{45502CF0-928D-44D5-8886-D139521CFA9E}" dt="2026-05-24T14:02:28.995" v="771" actId="113"/>
+      <pc:chgData name="Mehmedali Abdiu (s)" userId="6ba2def0-b9b1-4049-863c-8bfc2eb26721" providerId="ADAL" clId="{45502CF0-928D-44D5-8886-D139521CFA9E}" dt="2026-05-24T14:08:21.460" v="772"/>
       <pc:docMkLst>
         <pc:docMk/>
       </pc:docMkLst>
@@ -193,6 +193,21 @@
             <ac:cxnSpMk id="9" creationId="{7F0CFF5A-05C2-8432-600C-899A149ACA75}"/>
           </ac:cxnSpMkLst>
         </pc:cxnChg>
+      </pc:sldChg>
+      <pc:sldChg chg="modSp">
+        <pc:chgData name="Mehmedali Abdiu (s)" userId="6ba2def0-b9b1-4049-863c-8bfc2eb26721" providerId="ADAL" clId="{45502CF0-928D-44D5-8886-D139521CFA9E}" dt="2026-05-24T14:08:21.460" v="772"/>
+        <pc:sldMkLst>
+          <pc:docMk/>
+          <pc:sldMk cId="1822015730" sldId="264"/>
+        </pc:sldMkLst>
+        <pc:spChg chg="mod">
+          <ac:chgData name="Mehmedali Abdiu (s)" userId="6ba2def0-b9b1-4049-863c-8bfc2eb26721" providerId="ADAL" clId="{45502CF0-928D-44D5-8886-D139521CFA9E}" dt="2026-05-24T14:08:21.460" v="772"/>
+          <ac:spMkLst>
+            <pc:docMk/>
+            <pc:sldMk cId="1822015730" sldId="264"/>
+            <ac:spMk id="2" creationId="{59FFD96E-0374-7A4B-1629-8E6345607E66}"/>
+          </ac:spMkLst>
+        </pc:spChg>
       </pc:sldChg>
       <pc:sldChg chg="modSp mod">
         <pc:chgData name="Mehmedali Abdiu (s)" userId="6ba2def0-b9b1-4049-863c-8bfc2eb26721" providerId="ADAL" clId="{45502CF0-928D-44D5-8886-D139521CFA9E}" dt="2026-05-24T13:52:38.119" v="628" actId="6549"/>
@@ -23071,7 +23086,7 @@
               <a:t>Repo:</a:t>
             </a:r>
             <a:br>
-              <a:rPr lang="en-US" sz="4000" kern="1200" dirty="0">
+              <a:rPr lang="en-US" sz="4000" kern="1200">
                 <a:solidFill>
                   <a:schemeClr val="tx2"/>
                 </a:solidFill>
@@ -23081,12 +23096,12 @@
               </a:rPr>
             </a:br>
             <a:r>
-              <a:rPr lang="en-US" sz="4000" dirty="0">
+              <a:rPr lang="en-US" sz="4000">
                 <a:solidFill>
                   <a:schemeClr val="tx2"/>
                 </a:solidFill>
               </a:rPr>
-              <a:t>https://github.com/M-Abdiu/Gruppe_06-Arbeitszeitrechner_2.0/tree/main</a:t>
+              <a:t>https://github.com/M-Abdiu/Gruppe_06-Arbeitszeitrechner_2.0.git</a:t>
             </a:r>
             <a:endParaRPr lang="en-US" sz="4000" kern="1200" dirty="0">
               <a:solidFill>
